--- a/public/fun/cards/office/office-01.pptx
+++ b/public/fun/cards/office/office-01.pptx
@@ -3099,186 +3099,14 @@
       <p:grpSpPr/>
       <p:sp>
         <p:nvSpPr>
-          <p:cNvPr id="2" name="Rectangle 1"/>
-          <p:cNvSpPr/>
+          <p:cNvPr id="2" name="텍스트"/>
+          <p:cNvSpPr txBox="1"/>
           <p:nvPr/>
         </p:nvSpPr>
         <p:spPr>
           <a:xfrm>
-            <a:off x="0" y="0"/>
-            <a:ext cx="165600" cy="1800000"/>
-          </a:xfrm>
-          <a:prstGeom prst="rect">
-            <a:avLst/>
-          </a:prstGeom>
-          <a:solidFill>
-            <a:srgbClr val="B8517C"/>
-          </a:solidFill>
-          <a:ln>
-            <a:noFill/>
-          </a:ln>
-        </p:spPr>
-        <p:txBody>
-          <a:bodyPr rtlCol="0" anchor="ctr"/>
-          <a:lstStyle/>
-          <a:p>
-            <a:pPr algn="ctr"/>
-          </a:p>
-        </p:txBody>
-      </p:sp>
-      <p:sp>
-        <p:nvSpPr>
-          <p:cNvPr id="3" name="Rectangle 2"/>
-          <p:cNvSpPr/>
-          <p:nvPr/>
-        </p:nvSpPr>
-        <p:spPr>
-          <a:xfrm>
-            <a:off x="165600" y="0"/>
-            <a:ext cx="36000" cy="1800000"/>
-          </a:xfrm>
-          <a:prstGeom prst="rect">
-            <a:avLst/>
-          </a:prstGeom>
-          <a:solidFill>
-            <a:srgbClr val="EFD2DE"/>
-          </a:solidFill>
-          <a:ln>
-            <a:noFill/>
-          </a:ln>
-        </p:spPr>
-        <p:txBody>
-          <a:bodyPr rtlCol="0" anchor="ctr"/>
-          <a:lstStyle/>
-          <a:p>
-            <a:pPr algn="ctr"/>
-          </a:p>
-        </p:txBody>
-      </p:sp>
-      <p:sp>
-        <p:nvSpPr>
-          <p:cNvPr id="4" name="Rounded Rectangle 3"/>
-          <p:cNvSpPr/>
-          <p:nvPr/>
-        </p:nvSpPr>
-        <p:spPr>
-          <a:xfrm>
-            <a:off x="2683584" y="398736"/>
-            <a:ext cx="69120" cy="124416"/>
-          </a:xfrm>
-          <a:prstGeom prst="roundRect">
-            <a:avLst>
-              <a:gd name="adj" fmla="val 10000"/>
-            </a:avLst>
-          </a:prstGeom>
-          <a:solidFill>
-            <a:srgbClr val="B8517C"/>
-          </a:solidFill>
-          <a:ln>
-            <a:noFill/>
-          </a:ln>
-        </p:spPr>
-        <p:txBody>
-          <a:bodyPr rtlCol="0" anchor="ctr"/>
-          <a:lstStyle/>
-          <a:p>
-            <a:pPr algn="ctr"/>
-          </a:p>
-        </p:txBody>
-      </p:sp>
-      <p:sp>
-        <p:nvSpPr>
-          <p:cNvPr id="5" name="Rounded Rectangle 4"/>
-          <p:cNvSpPr/>
-          <p:nvPr/>
-        </p:nvSpPr>
-        <p:spPr>
-          <a:xfrm>
-            <a:off x="2773440" y="329616"/>
-            <a:ext cx="69120" cy="193536"/>
-          </a:xfrm>
-          <a:prstGeom prst="roundRect">
-            <a:avLst>
-              <a:gd name="adj" fmla="val 10000"/>
-            </a:avLst>
-          </a:prstGeom>
-          <a:solidFill>
-            <a:srgbClr val="EFD2DE"/>
-          </a:solidFill>
-          <a:ln>
-            <a:noFill/>
-          </a:ln>
-        </p:spPr>
-        <p:txBody>
-          <a:bodyPr rtlCol="0" anchor="ctr"/>
-          <a:lstStyle/>
-          <a:p>
-            <a:pPr algn="ctr"/>
-          </a:p>
-        </p:txBody>
-      </p:sp>
-      <p:sp>
-        <p:nvSpPr>
-          <p:cNvPr id="6" name="Rounded Rectangle 5"/>
-          <p:cNvSpPr/>
-          <p:nvPr/>
-        </p:nvSpPr>
-        <p:spPr>
-          <a:xfrm>
-            <a:off x="2863296" y="246672"/>
-            <a:ext cx="69120" cy="276480"/>
-          </a:xfrm>
-          <a:prstGeom prst="roundRect">
-            <a:avLst>
-              <a:gd name="adj" fmla="val 10000"/>
-            </a:avLst>
-          </a:prstGeom>
-          <a:solidFill>
-            <a:srgbClr val="B8517C"/>
-          </a:solidFill>
-          <a:ln>
-            <a:noFill/>
-          </a:ln>
-        </p:spPr>
-        <p:txBody>
-          <a:bodyPr rtlCol="0" anchor="ctr"/>
-          <a:lstStyle/>
-          <a:p>
-            <a:pPr algn="ctr"/>
-          </a:p>
-        </p:txBody>
-      </p:sp>
-      <p:cxnSp>
-        <p:nvCxnSpPr>
-          <p:cNvPr id="7" name="Connector 6"/>
-          <p:cNvCxnSpPr/>
-          <p:nvPr/>
-        </p:nvCxnSpPr>
-        <p:spPr>
-          <a:xfrm>
-            <a:off x="2655936" y="536976"/>
-            <a:ext cx="304128" cy="0"/>
-          </a:xfrm>
-          <a:prstGeom prst="line">
-            <a:avLst/>
-          </a:prstGeom>
-          <a:ln w="13824">
-            <a:solidFill>
-              <a:srgbClr val="EFD2DE"/>
-            </a:solidFill>
-          </a:ln>
-        </p:spPr>
-      </p:cxnSp>
-      <p:sp>
-        <p:nvSpPr>
-          <p:cNvPr id="8" name="텍스트"/>
-          <p:cNvSpPr txBox="1"/>
-          <p:nvPr/>
-        </p:nvSpPr>
-        <p:spPr>
-          <a:xfrm>
-            <a:off x="396000" y="223200"/>
-            <a:ext cx="2016000" cy="108000"/>
+            <a:off x="252000" y="223200"/>
+            <a:ext cx="2016000" cy="133351"/>
           </a:xfrm>
           <a:prstGeom prst="rect">
             <a:avLst/>
@@ -3293,13 +3121,13 @@
           <a:p>
             <a:pPr algn="l">
               <a:lnSpc>
-                <a:spcPts val="1087"/>
+                <a:spcPts val="1015"/>
               </a:lnSpc>
             </a:pPr>
             <a:r>
-              <a:rPr sz="750" b="1" spc="150">
+              <a:rPr sz="700" b="1" spc="200">
                 <a:solidFill>
-                  <a:srgbClr val="8C6676"/>
+                  <a:srgbClr val="6B7280"/>
                 </a:solidFill>
                 <a:latin typeface="맑은 고딕"/>
                 <a:ea typeface="맑은 고딕"/>
@@ -3311,14 +3139,43 @@
       </p:sp>
       <p:sp>
         <p:nvSpPr>
-          <p:cNvPr id="9" name="텍스트"/>
+          <p:cNvPr id="3" name="Oval 2"/>
+          <p:cNvSpPr/>
+          <p:nvPr/>
+        </p:nvSpPr>
+        <p:spPr>
+          <a:xfrm>
+            <a:off x="2955600" y="241200"/>
+            <a:ext cx="64800" cy="64800"/>
+          </a:xfrm>
+          <a:prstGeom prst="ellipse">
+            <a:avLst/>
+          </a:prstGeom>
+          <a:solidFill>
+            <a:srgbClr val="0057FF"/>
+          </a:solidFill>
+          <a:ln>
+            <a:noFill/>
+          </a:ln>
+        </p:spPr>
+        <p:txBody>
+          <a:bodyPr rtlCol="0" anchor="ctr"/>
+          <a:lstStyle/>
+          <a:p>
+            <a:pPr algn="ctr"/>
+          </a:p>
+        </p:txBody>
+      </p:sp>
+      <p:sp>
+        <p:nvSpPr>
+          <p:cNvPr id="4" name="텍스트"/>
           <p:cNvSpPr txBox="1"/>
           <p:nvPr/>
         </p:nvSpPr>
         <p:spPr>
           <a:xfrm>
-            <a:off x="396000" y="540000"/>
-            <a:ext cx="2160000" cy="313692"/>
+            <a:off x="252000" y="676800"/>
+            <a:ext cx="2520000" cy="360000"/>
           </a:xfrm>
           <a:prstGeom prst="rect">
             <a:avLst/>
@@ -3333,16 +3190,16 @@
           <a:p>
             <a:pPr algn="l">
               <a:lnSpc>
-                <a:spcPts val="2755"/>
+                <a:spcPts val="3190"/>
               </a:lnSpc>
             </a:pPr>
             <a:r>
-              <a:rPr sz="1900" b="1" spc="50">
+              <a:rPr sz="2200" b="1">
                 <a:solidFill>
-                  <a:srgbClr val="742F4C"/>
+                  <a:srgbClr val="12151C"/>
                 </a:solidFill>
-                <a:latin typeface="바탕"/>
-                <a:ea typeface="바탕"/>
+                <a:latin typeface="맑은 고딕"/>
+                <a:ea typeface="맑은 고딕"/>
               </a:rPr>
               <a:t>김하늘</a:t>
             </a:r>
@@ -3351,14 +3208,14 @@
       </p:sp>
       <p:sp>
         <p:nvSpPr>
-          <p:cNvPr id="10" name="텍스트"/>
+          <p:cNvPr id="5" name="텍스트"/>
           <p:cNvSpPr txBox="1"/>
           <p:nvPr/>
         </p:nvSpPr>
         <p:spPr>
           <a:xfrm>
-            <a:off x="396000" y="835200"/>
-            <a:ext cx="2160000" cy="129600"/>
+            <a:off x="252000" y="1080000"/>
+            <a:ext cx="2520000" cy="171451"/>
           </a:xfrm>
           <a:prstGeom prst="rect">
             <a:avLst/>
@@ -3373,13 +3230,13 @@
           <a:p>
             <a:pPr algn="l">
               <a:lnSpc>
-                <a:spcPts val="1232"/>
+                <a:spcPts val="1305"/>
               </a:lnSpc>
             </a:pPr>
             <a:r>
-              <a:rPr sz="850" b="1">
+              <a:rPr sz="900" b="0">
                 <a:solidFill>
-                  <a:srgbClr val="B8517C"/>
+                  <a:srgbClr val="6B7280"/>
                 </a:solidFill>
                 <a:latin typeface="맑은 고딕"/>
                 <a:ea typeface="맑은 고딕"/>
@@ -3389,45 +3246,37 @@
           </a:p>
         </p:txBody>
       </p:sp>
-      <p:sp>
-        <p:nvSpPr>
-          <p:cNvPr id="11" name="Rectangle 10"/>
-          <p:cNvSpPr/>
+      <p:cxnSp>
+        <p:nvCxnSpPr>
+          <p:cNvPr id="6" name="Connector 5"/>
+          <p:cNvCxnSpPr/>
           <p:nvPr/>
-        </p:nvSpPr>
+        </p:nvCxnSpPr>
         <p:spPr>
           <a:xfrm>
-            <a:off x="396000" y="1051200"/>
-            <a:ext cx="230400" cy="14400"/>
+            <a:off x="252000" y="1339200"/>
+            <a:ext cx="2736000" cy="0"/>
           </a:xfrm>
-          <a:prstGeom prst="rect">
+          <a:prstGeom prst="line">
             <a:avLst/>
           </a:prstGeom>
-          <a:solidFill>
-            <a:srgbClr val="B8517C"/>
-          </a:solidFill>
-          <a:ln>
-            <a:noFill/>
+          <a:ln w="5760">
+            <a:solidFill>
+              <a:srgbClr val="E3E5E9"/>
+            </a:solidFill>
           </a:ln>
         </p:spPr>
-        <p:txBody>
-          <a:bodyPr rtlCol="0" anchor="ctr"/>
-          <a:lstStyle/>
-          <a:p>
-            <a:pPr algn="ctr"/>
-          </a:p>
-        </p:txBody>
-      </p:sp>
-      <p:sp>
-        <p:nvSpPr>
-          <p:cNvPr id="12" name="텍스트"/>
+      </p:cxnSp>
+      <p:sp>
+        <p:nvSpPr>
+          <p:cNvPr id="7" name="텍스트"/>
           <p:cNvSpPr txBox="1"/>
           <p:nvPr/>
         </p:nvSpPr>
         <p:spPr>
           <a:xfrm>
-            <a:off x="396000" y="1188000"/>
-            <a:ext cx="122400" cy="168911"/>
+            <a:off x="252000" y="1411200"/>
+            <a:ext cx="792000" cy="129541"/>
           </a:xfrm>
           <a:prstGeom prst="rect">
             <a:avLst/>
@@ -3442,32 +3291,32 @@
           <a:p>
             <a:pPr algn="l">
               <a:lnSpc>
-                <a:spcPts val="1015"/>
+                <a:spcPts val="986"/>
               </a:lnSpc>
             </a:pPr>
             <a:r>
-              <a:rPr sz="700" b="1">
+              <a:rPr sz="680" b="0">
                 <a:solidFill>
-                  <a:srgbClr val="B8517C"/>
+                  <a:srgbClr val="12151C"/>
                 </a:solidFill>
                 <a:latin typeface="맑은 고딕"/>
                 <a:ea typeface="맑은 고딕"/>
               </a:rPr>
-              <a:t>T</a:t>
-            </a:r>
-          </a:p>
-        </p:txBody>
-      </p:sp>
-      <p:sp>
-        <p:nvSpPr>
-          <p:cNvPr id="13" name="텍스트"/>
+              <a:t>010-1234-5678</a:t>
+            </a:r>
+          </a:p>
+        </p:txBody>
+      </p:sp>
+      <p:sp>
+        <p:nvSpPr>
+          <p:cNvPr id="8" name="텍스트"/>
           <p:cNvSpPr txBox="1"/>
           <p:nvPr/>
         </p:nvSpPr>
         <p:spPr>
           <a:xfrm>
-            <a:off x="540000" y="1188000"/>
-            <a:ext cx="1872000" cy="168911"/>
+            <a:off x="1080000" y="1411200"/>
+            <a:ext cx="900000" cy="129541"/>
           </a:xfrm>
           <a:prstGeom prst="rect">
             <a:avLst/>
@@ -3482,32 +3331,32 @@
           <a:p>
             <a:pPr algn="l">
               <a:lnSpc>
-                <a:spcPts val="1015"/>
+                <a:spcPts val="986"/>
               </a:lnSpc>
             </a:pPr>
             <a:r>
-              <a:rPr sz="700" b="0">
+              <a:rPr sz="680" b="0">
                 <a:solidFill>
-                  <a:srgbClr val="742F4C"/>
+                  <a:srgbClr val="12151C"/>
                 </a:solidFill>
                 <a:latin typeface="맑은 고딕"/>
                 <a:ea typeface="맑은 고딕"/>
               </a:rPr>
-              <a:t>010-1234-5678</a:t>
-            </a:r>
-          </a:p>
-        </p:txBody>
-      </p:sp>
-      <p:sp>
-        <p:nvSpPr>
-          <p:cNvPr id="14" name="텍스트"/>
+              <a:t>name@example.com</a:t>
+            </a:r>
+          </a:p>
+        </p:txBody>
+      </p:sp>
+      <p:sp>
+        <p:nvSpPr>
+          <p:cNvPr id="9" name="텍스트"/>
           <p:cNvSpPr txBox="1"/>
           <p:nvPr/>
         </p:nvSpPr>
         <p:spPr>
           <a:xfrm>
-            <a:off x="396000" y="1356911"/>
-            <a:ext cx="122400" cy="168911"/>
+            <a:off x="2052000" y="1411200"/>
+            <a:ext cx="972000" cy="129541"/>
           </a:xfrm>
           <a:prstGeom prst="rect">
             <a:avLst/>
@@ -3522,32 +3371,32 @@
           <a:p>
             <a:pPr algn="l">
               <a:lnSpc>
-                <a:spcPts val="1015"/>
+                <a:spcPts val="986"/>
               </a:lnSpc>
             </a:pPr>
             <a:r>
-              <a:rPr sz="700" b="1">
+              <a:rPr sz="680" b="0">
                 <a:solidFill>
-                  <a:srgbClr val="B8517C"/>
+                  <a:srgbClr val="12151C"/>
                 </a:solidFill>
                 <a:latin typeface="맑은 고딕"/>
                 <a:ea typeface="맑은 고딕"/>
               </a:rPr>
-              <a:t>E</a:t>
-            </a:r>
-          </a:p>
-        </p:txBody>
-      </p:sp>
-      <p:sp>
-        <p:nvSpPr>
-          <p:cNvPr id="15" name="텍스트"/>
+              <a:t>주소를 입력해 주세요</a:t>
+            </a:r>
+          </a:p>
+        </p:txBody>
+      </p:sp>
+      <p:sp>
+        <p:nvSpPr>
+          <p:cNvPr id="10" name="텍스트"/>
           <p:cNvSpPr txBox="1"/>
           <p:nvPr/>
         </p:nvSpPr>
         <p:spPr>
           <a:xfrm>
-            <a:off x="540000" y="1356911"/>
-            <a:ext cx="1872000" cy="168911"/>
+            <a:off x="252000" y="1526400"/>
+            <a:ext cx="216000" cy="95251"/>
           </a:xfrm>
           <a:prstGeom prst="rect">
             <a:avLst/>
@@ -3562,32 +3411,32 @@
           <a:p>
             <a:pPr algn="l">
               <a:lnSpc>
-                <a:spcPts val="1015"/>
+                <a:spcPts val="725"/>
               </a:lnSpc>
             </a:pPr>
             <a:r>
-              <a:rPr sz="700" b="0">
+              <a:rPr sz="500" b="1" spc="120">
                 <a:solidFill>
-                  <a:srgbClr val="742F4C"/>
+                  <a:srgbClr val="6B7280"/>
                 </a:solidFill>
                 <a:latin typeface="맑은 고딕"/>
                 <a:ea typeface="맑은 고딕"/>
               </a:rPr>
-              <a:t>name@example.com</a:t>
-            </a:r>
-          </a:p>
-        </p:txBody>
-      </p:sp>
-      <p:sp>
-        <p:nvSpPr>
-          <p:cNvPr id="16" name="텍스트"/>
+              <a:t>TEL</a:t>
+            </a:r>
+          </a:p>
+        </p:txBody>
+      </p:sp>
+      <p:sp>
+        <p:nvSpPr>
+          <p:cNvPr id="11" name="텍스트"/>
           <p:cNvSpPr txBox="1"/>
           <p:nvPr/>
         </p:nvSpPr>
         <p:spPr>
           <a:xfrm>
-            <a:off x="396000" y="1525822"/>
-            <a:ext cx="122400" cy="168911"/>
+            <a:off x="1080000" y="1526400"/>
+            <a:ext cx="216000" cy="95251"/>
           </a:xfrm>
           <a:prstGeom prst="rect">
             <a:avLst/>
@@ -3602,32 +3451,32 @@
           <a:p>
             <a:pPr algn="l">
               <a:lnSpc>
-                <a:spcPts val="1015"/>
+                <a:spcPts val="725"/>
               </a:lnSpc>
             </a:pPr>
             <a:r>
-              <a:rPr sz="700" b="1">
+              <a:rPr sz="500" b="1" spc="120">
                 <a:solidFill>
-                  <a:srgbClr val="B8517C"/>
+                  <a:srgbClr val="6B7280"/>
                 </a:solidFill>
                 <a:latin typeface="맑은 고딕"/>
                 <a:ea typeface="맑은 고딕"/>
               </a:rPr>
-              <a:t>A</a:t>
-            </a:r>
-          </a:p>
-        </p:txBody>
-      </p:sp>
-      <p:sp>
-        <p:nvSpPr>
-          <p:cNvPr id="17" name="텍스트"/>
+              <a:t>MAIL</a:t>
+            </a:r>
+          </a:p>
+        </p:txBody>
+      </p:sp>
+      <p:sp>
+        <p:nvSpPr>
+          <p:cNvPr id="12" name="텍스트"/>
           <p:cNvSpPr txBox="1"/>
           <p:nvPr/>
         </p:nvSpPr>
         <p:spPr>
           <a:xfrm>
-            <a:off x="540000" y="1525822"/>
-            <a:ext cx="1872000" cy="168911"/>
+            <a:off x="2052000" y="1526400"/>
+            <a:ext cx="216000" cy="95251"/>
           </a:xfrm>
           <a:prstGeom prst="rect">
             <a:avLst/>
@@ -3642,18 +3491,18 @@
           <a:p>
             <a:pPr algn="l">
               <a:lnSpc>
-                <a:spcPts val="1015"/>
+                <a:spcPts val="725"/>
               </a:lnSpc>
             </a:pPr>
             <a:r>
-              <a:rPr sz="700" b="0">
+              <a:rPr sz="500" b="1" spc="120">
                 <a:solidFill>
-                  <a:srgbClr val="742F4C"/>
+                  <a:srgbClr val="6B7280"/>
                 </a:solidFill>
                 <a:latin typeface="맑은 고딕"/>
                 <a:ea typeface="맑은 고딕"/>
               </a:rPr>
-              <a:t>주소를 입력해 주세요</a:t>
+              <a:t>ADDR</a:t>
             </a:r>
           </a:p>
         </p:txBody>
@@ -3672,7 +3521,7 @@
     <p:bg>
       <p:bgPr>
         <a:solidFill>
-          <a:srgbClr val="742F4C"/>
+          <a:srgbClr val="0057FF"/>
         </a:solidFill>
         <a:effectLst/>
       </p:bgPr>
@@ -3699,7 +3548,7 @@
             <a:avLst/>
           </a:prstGeom>
           <a:solidFill>
-            <a:srgbClr val="CC82A1"/>
+            <a:srgbClr val="3379FF"/>
           </a:solidFill>
           <a:ln>
             <a:noFill/>
@@ -3715,22 +3564,107 @@
       </p:sp>
       <p:sp>
         <p:nvSpPr>
-          <p:cNvPr id="3" name="Rounded Rectangle 2"/>
+          <p:cNvPr id="3" name="Freeform 2"/>
           <p:cNvSpPr/>
           <p:nvPr/>
         </p:nvSpPr>
         <p:spPr>
           <a:xfrm>
-            <a:off x="1490400" y="561600"/>
-            <a:ext cx="72000" cy="129600"/>
+            <a:off x="2412000" y="972000"/>
+            <a:ext cx="828000" cy="828000"/>
           </a:xfrm>
-          <a:prstGeom prst="roundRect">
-            <a:avLst>
-              <a:gd name="adj" fmla="val 10000"/>
-            </a:avLst>
-          </a:prstGeom>
+          <a:custGeom>
+            <a:avLst/>
+            <a:gdLst/>
+            <a:ahLst/>
+            <a:cxnLst/>
+            <a:rect l="l" t="t" r="r" b="b"/>
+            <a:pathLst>
+              <a:path w="828000" h="828000">
+                <a:moveTo>
+                  <a:pt x="828000" y="828000"/>
+                </a:moveTo>
+                <a:lnTo>
+                  <a:pt x="0" y="828000"/>
+                </a:lnTo>
+                <a:lnTo>
+                  <a:pt x="1773" y="773846"/>
+                </a:lnTo>
+                <a:lnTo>
+                  <a:pt x="7084" y="719924"/>
+                </a:lnTo>
+                <a:lnTo>
+                  <a:pt x="15910" y="666465"/>
+                </a:lnTo>
+                <a:lnTo>
+                  <a:pt x="28213" y="613698"/>
+                </a:lnTo>
+                <a:lnTo>
+                  <a:pt x="43942" y="561848"/>
+                </a:lnTo>
+                <a:lnTo>
+                  <a:pt x="63028" y="511138"/>
+                </a:lnTo>
+                <a:lnTo>
+                  <a:pt x="85389" y="461785"/>
+                </a:lnTo>
+                <a:lnTo>
+                  <a:pt x="110931" y="414000"/>
+                </a:lnTo>
+                <a:lnTo>
+                  <a:pt x="139543" y="367988"/>
+                </a:lnTo>
+                <a:lnTo>
+                  <a:pt x="171103" y="323946"/>
+                </a:lnTo>
+                <a:lnTo>
+                  <a:pt x="205477" y="282062"/>
+                </a:lnTo>
+                <a:lnTo>
+                  <a:pt x="242516" y="242516"/>
+                </a:lnTo>
+                <a:lnTo>
+                  <a:pt x="282062" y="205477"/>
+                </a:lnTo>
+                <a:lnTo>
+                  <a:pt x="323946" y="171103"/>
+                </a:lnTo>
+                <a:lnTo>
+                  <a:pt x="367988" y="139543"/>
+                </a:lnTo>
+                <a:lnTo>
+                  <a:pt x="414000" y="110931"/>
+                </a:lnTo>
+                <a:lnTo>
+                  <a:pt x="461785" y="85389"/>
+                </a:lnTo>
+                <a:lnTo>
+                  <a:pt x="511138" y="63028"/>
+                </a:lnTo>
+                <a:lnTo>
+                  <a:pt x="561848" y="43942"/>
+                </a:lnTo>
+                <a:lnTo>
+                  <a:pt x="613698" y="28213"/>
+                </a:lnTo>
+                <a:lnTo>
+                  <a:pt x="666465" y="15910"/>
+                </a:lnTo>
+                <a:lnTo>
+                  <a:pt x="719924" y="7084"/>
+                </a:lnTo>
+                <a:lnTo>
+                  <a:pt x="773846" y="1773"/>
+                </a:lnTo>
+                <a:lnTo>
+                  <a:pt x="828000" y="0"/>
+                </a:lnTo>
+                <a:close/>
+              </a:path>
+            </a:pathLst>
+          </a:custGeom>
           <a:solidFill>
-            <a:srgbClr val="FFFFFF"/>
+            <a:srgbClr val="6096FF"/>
           </a:solidFill>
           <a:ln>
             <a:noFill/>
@@ -3746,97 +3680,14 @@
       </p:sp>
       <p:sp>
         <p:nvSpPr>
-          <p:cNvPr id="4" name="Rounded Rectangle 3"/>
-          <p:cNvSpPr/>
+          <p:cNvPr id="4" name="텍스트"/>
+          <p:cNvSpPr txBox="1"/>
           <p:nvPr/>
         </p:nvSpPr>
         <p:spPr>
           <a:xfrm>
-            <a:off x="1584000" y="489600"/>
-            <a:ext cx="72000" cy="201600"/>
-          </a:xfrm>
-          <a:prstGeom prst="roundRect">
-            <a:avLst>
-              <a:gd name="adj" fmla="val 10000"/>
-            </a:avLst>
-          </a:prstGeom>
-          <a:solidFill>
-            <a:srgbClr val="FFFFFF"/>
-          </a:solidFill>
-          <a:ln>
-            <a:noFill/>
-          </a:ln>
-        </p:spPr>
-        <p:txBody>
-          <a:bodyPr rtlCol="0" anchor="ctr"/>
-          <a:lstStyle/>
-          <a:p>
-            <a:pPr algn="ctr"/>
-          </a:p>
-        </p:txBody>
-      </p:sp>
-      <p:sp>
-        <p:nvSpPr>
-          <p:cNvPr id="5" name="Rounded Rectangle 4"/>
-          <p:cNvSpPr/>
-          <p:nvPr/>
-        </p:nvSpPr>
-        <p:spPr>
-          <a:xfrm>
-            <a:off x="1677600" y="403200"/>
-            <a:ext cx="72000" cy="288000"/>
-          </a:xfrm>
-          <a:prstGeom prst="roundRect">
-            <a:avLst>
-              <a:gd name="adj" fmla="val 10000"/>
-            </a:avLst>
-          </a:prstGeom>
-          <a:solidFill>
-            <a:srgbClr val="FFFFFF"/>
-          </a:solidFill>
-          <a:ln>
-            <a:noFill/>
-          </a:ln>
-        </p:spPr>
-        <p:txBody>
-          <a:bodyPr rtlCol="0" anchor="ctr"/>
-          <a:lstStyle/>
-          <a:p>
-            <a:pPr algn="ctr"/>
-          </a:p>
-        </p:txBody>
-      </p:sp>
-      <p:cxnSp>
-        <p:nvCxnSpPr>
-          <p:cNvPr id="6" name="Connector 5"/>
-          <p:cNvCxnSpPr/>
-          <p:nvPr/>
-        </p:nvCxnSpPr>
-        <p:spPr>
-          <a:xfrm>
-            <a:off x="1461600" y="705600"/>
-            <a:ext cx="316800" cy="0"/>
-          </a:xfrm>
-          <a:prstGeom prst="line">
-            <a:avLst/>
-          </a:prstGeom>
-          <a:ln w="14400">
-            <a:solidFill>
-              <a:srgbClr val="FFFFFF"/>
-            </a:solidFill>
-          </a:ln>
-        </p:spPr>
-      </p:cxnSp>
-      <p:sp>
-        <p:nvSpPr>
-          <p:cNvPr id="7" name="텍스트"/>
-          <p:cNvSpPr txBox="1"/>
-          <p:nvPr/>
-        </p:nvSpPr>
-        <p:spPr>
-          <a:xfrm>
-            <a:off x="396000" y="835200"/>
-            <a:ext cx="2448000" cy="396000"/>
+            <a:off x="252000" y="432000"/>
+            <a:ext cx="2304000" cy="720000"/>
           </a:xfrm>
           <a:prstGeom prst="rect">
             <a:avLst/>
@@ -3844,39 +3695,56 @@
           <a:noFill/>
         </p:spPr>
         <p:txBody>
-          <a:bodyPr wrap="square" lIns="0" rIns="0" tIns="0" bIns="0" anchor="ctr">
+          <a:bodyPr wrap="square" lIns="0" rIns="0" tIns="0" bIns="0" anchor="t">
             <a:spAutoFit/>
           </a:bodyPr>
           <a:lstStyle/>
           <a:p>
-            <a:pPr algn="ctr">
+            <a:pPr algn="l">
               <a:lnSpc>
-                <a:spcPts val="1667"/>
+                <a:spcPts val="1884"/>
               </a:lnSpc>
             </a:pPr>
             <a:r>
-              <a:rPr sz="1150" b="1">
+              <a:rPr sz="1300" b="1">
                 <a:solidFill>
                   <a:srgbClr val="FFFFFF"/>
                 </a:solidFill>
                 <a:latin typeface="맑은 고딕"/>
                 <a:ea typeface="맑은 고딕"/>
               </a:rPr>
-              <a:t>오늘의 성실이 내일의 신뢰가 됩니다</a:t>
-            </a:r>
-          </a:p>
-        </p:txBody>
-      </p:sp>
-      <p:sp>
-        <p:nvSpPr>
-          <p:cNvPr id="8" name="텍스트"/>
+              <a:t>오늘의 성실이 내일의</a:t>
+            </a:r>
+          </a:p>
+          <a:p>
+            <a:pPr algn="l">
+              <a:lnSpc>
+                <a:spcPts val="1884"/>
+              </a:lnSpc>
+            </a:pPr>
+            <a:r>
+              <a:rPr sz="1300" b="1">
+                <a:solidFill>
+                  <a:srgbClr val="FFFFFF"/>
+                </a:solidFill>
+                <a:latin typeface="맑은 고딕"/>
+                <a:ea typeface="맑은 고딕"/>
+              </a:rPr>
+              <a:t>신뢰가 됩니다</a:t>
+            </a:r>
+          </a:p>
+        </p:txBody>
+      </p:sp>
+      <p:sp>
+        <p:nvSpPr>
+          <p:cNvPr id="5" name="텍스트"/>
           <p:cNvSpPr txBox="1"/>
           <p:nvPr/>
         </p:nvSpPr>
         <p:spPr>
           <a:xfrm>
-            <a:off x="360000" y="1476000"/>
-            <a:ext cx="2520000" cy="108000"/>
+            <a:off x="252000" y="1476000"/>
+            <a:ext cx="1800000" cy="133351"/>
           </a:xfrm>
           <a:prstGeom prst="rect">
             <a:avLst/>
@@ -3889,13 +3757,13 @@
           </a:bodyPr>
           <a:lstStyle/>
           <a:p>
-            <a:pPr algn="ctr">
+            <a:pPr algn="l">
               <a:lnSpc>
                 <a:spcPts val="1015"/>
               </a:lnSpc>
             </a:pPr>
             <a:r>
-              <a:rPr sz="700" b="1" spc="300">
+              <a:rPr sz="700" b="1" spc="200">
                 <a:solidFill>
                   <a:srgbClr val="FFFFFF"/>
                 </a:solidFill>

--- a/public/fun/cards/office/office-01.pptx
+++ b/public/fun/cards/office/office-01.pptx
@@ -3099,56 +3099,45 @@
       <p:grpSpPr/>
       <p:sp>
         <p:nvSpPr>
-          <p:cNvPr id="2" name="텍스트"/>
-          <p:cNvSpPr txBox="1"/>
+          <p:cNvPr id="2" name="Rectangle 1"/>
+          <p:cNvSpPr/>
           <p:nvPr/>
         </p:nvSpPr>
         <p:spPr>
           <a:xfrm>
-            <a:off x="252000" y="223200"/>
-            <a:ext cx="2016000" cy="133351"/>
+            <a:off x="93600" y="93600"/>
+            <a:ext cx="3052800" cy="1612800"/>
           </a:xfrm>
           <a:prstGeom prst="rect">
             <a:avLst/>
           </a:prstGeom>
           <a:noFill/>
-        </p:spPr>
-        <p:txBody>
-          <a:bodyPr wrap="square" lIns="0" rIns="0" tIns="0" bIns="0" anchor="t">
-            <a:spAutoFit/>
-          </a:bodyPr>
-          <a:lstStyle/>
-          <a:p>
-            <a:pPr algn="l">
-              <a:lnSpc>
-                <a:spcPts val="1015"/>
-              </a:lnSpc>
-            </a:pPr>
-            <a:r>
-              <a:rPr sz="700" b="1" spc="200">
-                <a:solidFill>
-                  <a:srgbClr val="6B7280"/>
-                </a:solidFill>
-                <a:latin typeface="맑은 고딕"/>
-                <a:ea typeface="맑은 고딕"/>
-              </a:rPr>
-              <a:t>회사명 · 부서명</a:t>
-            </a:r>
-          </a:p>
-        </p:txBody>
-      </p:sp>
-      <p:sp>
-        <p:nvSpPr>
-          <p:cNvPr id="3" name="Oval 2"/>
+          <a:ln w="3600">
+            <a:solidFill>
+              <a:srgbClr val="E3E5E9"/>
+            </a:solidFill>
+          </a:ln>
+        </p:spPr>
+        <p:txBody>
+          <a:bodyPr rtlCol="0" anchor="ctr"/>
+          <a:lstStyle/>
+          <a:p>
+            <a:pPr algn="ctr"/>
+          </a:p>
+        </p:txBody>
+      </p:sp>
+      <p:sp>
+        <p:nvSpPr>
+          <p:cNvPr id="3" name="Rectangle 2"/>
           <p:cNvSpPr/>
           <p:nvPr/>
         </p:nvSpPr>
         <p:spPr>
           <a:xfrm>
-            <a:off x="2955600" y="241200"/>
-            <a:ext cx="64800" cy="64800"/>
-          </a:xfrm>
-          <a:prstGeom prst="ellipse">
+            <a:off x="252000" y="252000"/>
+            <a:ext cx="79200" cy="79200"/>
+          </a:xfrm>
+          <a:prstGeom prst="rect">
             <a:avLst/>
           </a:prstGeom>
           <a:solidFill>
@@ -3174,8 +3163,8 @@
         </p:nvSpPr>
         <p:spPr>
           <a:xfrm>
-            <a:off x="252000" y="676800"/>
-            <a:ext cx="2520000" cy="360000"/>
+            <a:off x="396000" y="259200"/>
+            <a:ext cx="1512000" cy="123826"/>
           </a:xfrm>
           <a:prstGeom prst="rect">
             <a:avLst/>
@@ -3190,11 +3179,72 @@
           <a:p>
             <a:pPr algn="l">
               <a:lnSpc>
-                <a:spcPts val="3190"/>
+                <a:spcPts val="942"/>
               </a:lnSpc>
             </a:pPr>
             <a:r>
-              <a:rPr sz="2200" b="1">
+              <a:rPr sz="650" b="1" spc="220">
+                <a:solidFill>
+                  <a:srgbClr val="6B7280"/>
+                </a:solidFill>
+                <a:latin typeface="맑은 고딕"/>
+                <a:ea typeface="맑은 고딕"/>
+              </a:rPr>
+              <a:t>회사명 · 부서명</a:t>
+            </a:r>
+          </a:p>
+        </p:txBody>
+      </p:sp>
+      <p:cxnSp>
+        <p:nvCxnSpPr>
+          <p:cNvPr id="5" name="Connector 4"/>
+          <p:cNvCxnSpPr/>
+          <p:nvPr/>
+        </p:nvCxnSpPr>
+        <p:spPr>
+          <a:xfrm>
+            <a:off x="252000" y="446400"/>
+            <a:ext cx="2736000" cy="0"/>
+          </a:xfrm>
+          <a:prstGeom prst="line">
+            <a:avLst/>
+          </a:prstGeom>
+          <a:ln w="3600">
+            <a:solidFill>
+              <a:srgbClr val="E3E5E9"/>
+            </a:solidFill>
+          </a:ln>
+        </p:spPr>
+      </p:cxnSp>
+      <p:sp>
+        <p:nvSpPr>
+          <p:cNvPr id="6" name="텍스트"/>
+          <p:cNvSpPr txBox="1"/>
+          <p:nvPr/>
+        </p:nvSpPr>
+        <p:spPr>
+          <a:xfrm>
+            <a:off x="252000" y="964800"/>
+            <a:ext cx="1800000" cy="237600"/>
+          </a:xfrm>
+          <a:prstGeom prst="rect">
+            <a:avLst/>
+          </a:prstGeom>
+          <a:noFill/>
+        </p:spPr>
+        <p:txBody>
+          <a:bodyPr wrap="square" lIns="0" rIns="0" tIns="0" bIns="0" anchor="t">
+            <a:spAutoFit/>
+          </a:bodyPr>
+          <a:lstStyle/>
+          <a:p>
+            <a:pPr algn="l">
+              <a:lnSpc>
+                <a:spcPts val="1957"/>
+              </a:lnSpc>
+            </a:pPr>
+            <a:r>
+              <a:rPr sz="1350" b="1" spc="120">
                 <a:solidFill>
                   <a:srgbClr val="12151C"/>
                 </a:solidFill>
@@ -3208,14 +3258,14 @@
       </p:sp>
       <p:sp>
         <p:nvSpPr>
-          <p:cNvPr id="5" name="텍스트"/>
+          <p:cNvPr id="7" name="텍스트"/>
           <p:cNvSpPr txBox="1"/>
           <p:nvPr/>
         </p:nvSpPr>
         <p:spPr>
           <a:xfrm>
-            <a:off x="252000" y="1080000"/>
-            <a:ext cx="2520000" cy="171451"/>
+            <a:off x="252000" y="1216800"/>
+            <a:ext cx="1800000" cy="133351"/>
           </a:xfrm>
           <a:prstGeom prst="rect">
             <a:avLst/>
@@ -3230,11 +3280,11 @@
           <a:p>
             <a:pPr algn="l">
               <a:lnSpc>
-                <a:spcPts val="1305"/>
+                <a:spcPts val="1015"/>
               </a:lnSpc>
             </a:pPr>
             <a:r>
-              <a:rPr sz="900" b="0">
+              <a:rPr sz="700" b="0" spc="60">
                 <a:solidFill>
                   <a:srgbClr val="6B7280"/>
                 </a:solidFill>
@@ -3248,19 +3298,19 @@
       </p:sp>
       <p:cxnSp>
         <p:nvCxnSpPr>
-          <p:cNvPr id="6" name="Connector 5"/>
+          <p:cNvPr id="8" name="Connector 7"/>
           <p:cNvCxnSpPr/>
           <p:nvPr/>
         </p:nvCxnSpPr>
         <p:spPr>
           <a:xfrm>
-            <a:off x="252000" y="1339200"/>
-            <a:ext cx="2736000" cy="0"/>
+            <a:off x="1872000" y="943200"/>
+            <a:ext cx="0" cy="604800"/>
           </a:xfrm>
           <a:prstGeom prst="line">
             <a:avLst/>
           </a:prstGeom>
-          <a:ln w="5760">
+          <a:ln w="3600">
             <a:solidFill>
               <a:srgbClr val="E3E5E9"/>
             </a:solidFill>
@@ -3269,14 +3319,14 @@
       </p:cxnSp>
       <p:sp>
         <p:nvSpPr>
-          <p:cNvPr id="7" name="텍스트"/>
+          <p:cNvPr id="9" name="텍스트"/>
           <p:cNvSpPr txBox="1"/>
           <p:nvPr/>
         </p:nvSpPr>
         <p:spPr>
           <a:xfrm>
-            <a:off x="252000" y="1411200"/>
-            <a:ext cx="792000" cy="129541"/>
+            <a:off x="2016000" y="1033200"/>
+            <a:ext cx="302400" cy="91441"/>
           </a:xfrm>
           <a:prstGeom prst="rect">
             <a:avLst/>
@@ -3291,11 +3341,51 @@
           <a:p>
             <a:pPr algn="l">
               <a:lnSpc>
-                <a:spcPts val="986"/>
+                <a:spcPts val="696"/>
               </a:lnSpc>
             </a:pPr>
             <a:r>
-              <a:rPr sz="680" b="0">
+              <a:rPr sz="480" b="1" spc="140">
+                <a:solidFill>
+                  <a:srgbClr val="6B7280"/>
+                </a:solidFill>
+                <a:latin typeface="맑은 고딕"/>
+                <a:ea typeface="맑은 고딕"/>
+              </a:rPr>
+              <a:t>TEL</a:t>
+            </a:r>
+          </a:p>
+        </p:txBody>
+      </p:sp>
+      <p:sp>
+        <p:nvSpPr>
+          <p:cNvPr id="10" name="텍스트"/>
+          <p:cNvSpPr txBox="1"/>
+          <p:nvPr/>
+        </p:nvSpPr>
+        <p:spPr>
+          <a:xfrm>
+            <a:off x="2318400" y="1022400"/>
+            <a:ext cx="972000" cy="123826"/>
+          </a:xfrm>
+          <a:prstGeom prst="rect">
+            <a:avLst/>
+          </a:prstGeom>
+          <a:noFill/>
+        </p:spPr>
+        <p:txBody>
+          <a:bodyPr wrap="square" lIns="0" rIns="0" tIns="0" bIns="0" anchor="t">
+            <a:spAutoFit/>
+          </a:bodyPr>
+          <a:lstStyle/>
+          <a:p>
+            <a:pPr algn="l">
+              <a:lnSpc>
+                <a:spcPts val="942"/>
+              </a:lnSpc>
+            </a:pPr>
+            <a:r>
+              <a:rPr sz="650" b="0">
                 <a:solidFill>
                   <a:srgbClr val="12151C"/>
                 </a:solidFill>
@@ -3309,14 +3399,14 @@
       </p:sp>
       <p:sp>
         <p:nvSpPr>
-          <p:cNvPr id="8" name="텍스트"/>
+          <p:cNvPr id="11" name="텍스트"/>
           <p:cNvSpPr txBox="1"/>
           <p:nvPr/>
         </p:nvSpPr>
         <p:spPr>
           <a:xfrm>
-            <a:off x="1080000" y="1411200"/>
-            <a:ext cx="900000" cy="129541"/>
+            <a:off x="2016000" y="1177200"/>
+            <a:ext cx="302400" cy="91441"/>
           </a:xfrm>
           <a:prstGeom prst="rect">
             <a:avLst/>
@@ -3331,11 +3421,51 @@
           <a:p>
             <a:pPr algn="l">
               <a:lnSpc>
-                <a:spcPts val="986"/>
+                <a:spcPts val="696"/>
               </a:lnSpc>
             </a:pPr>
             <a:r>
-              <a:rPr sz="680" b="0">
+              <a:rPr sz="480" b="1" spc="140">
+                <a:solidFill>
+                  <a:srgbClr val="6B7280"/>
+                </a:solidFill>
+                <a:latin typeface="맑은 고딕"/>
+                <a:ea typeface="맑은 고딕"/>
+              </a:rPr>
+              <a:t>MAIL</a:t>
+            </a:r>
+          </a:p>
+        </p:txBody>
+      </p:sp>
+      <p:sp>
+        <p:nvSpPr>
+          <p:cNvPr id="12" name="텍스트"/>
+          <p:cNvSpPr txBox="1"/>
+          <p:nvPr/>
+        </p:nvSpPr>
+        <p:spPr>
+          <a:xfrm>
+            <a:off x="2318400" y="1166400"/>
+            <a:ext cx="972000" cy="123826"/>
+          </a:xfrm>
+          <a:prstGeom prst="rect">
+            <a:avLst/>
+          </a:prstGeom>
+          <a:noFill/>
+        </p:spPr>
+        <p:txBody>
+          <a:bodyPr wrap="square" lIns="0" rIns="0" tIns="0" bIns="0" anchor="t">
+            <a:spAutoFit/>
+          </a:bodyPr>
+          <a:lstStyle/>
+          <a:p>
+            <a:pPr algn="l">
+              <a:lnSpc>
+                <a:spcPts val="942"/>
+              </a:lnSpc>
+            </a:pPr>
+            <a:r>
+              <a:rPr sz="650" b="0">
                 <a:solidFill>
                   <a:srgbClr val="12151C"/>
                 </a:solidFill>
@@ -3349,14 +3479,14 @@
       </p:sp>
       <p:sp>
         <p:nvSpPr>
-          <p:cNvPr id="9" name="텍스트"/>
+          <p:cNvPr id="13" name="텍스트"/>
           <p:cNvSpPr txBox="1"/>
           <p:nvPr/>
         </p:nvSpPr>
         <p:spPr>
           <a:xfrm>
-            <a:off x="2052000" y="1411200"/>
-            <a:ext cx="972000" cy="129541"/>
+            <a:off x="2016000" y="1321200"/>
+            <a:ext cx="302400" cy="91441"/>
           </a:xfrm>
           <a:prstGeom prst="rect">
             <a:avLst/>
@@ -3371,11 +3501,51 @@
           <a:p>
             <a:pPr algn="l">
               <a:lnSpc>
-                <a:spcPts val="986"/>
+                <a:spcPts val="696"/>
               </a:lnSpc>
             </a:pPr>
             <a:r>
-              <a:rPr sz="680" b="0">
+              <a:rPr sz="480" b="1" spc="140">
+                <a:solidFill>
+                  <a:srgbClr val="6B7280"/>
+                </a:solidFill>
+                <a:latin typeface="맑은 고딕"/>
+                <a:ea typeface="맑은 고딕"/>
+              </a:rPr>
+              <a:t>ADDR</a:t>
+            </a:r>
+          </a:p>
+        </p:txBody>
+      </p:sp>
+      <p:sp>
+        <p:nvSpPr>
+          <p:cNvPr id="14" name="텍스트"/>
+          <p:cNvSpPr txBox="1"/>
+          <p:nvPr/>
+        </p:nvSpPr>
+        <p:spPr>
+          <a:xfrm>
+            <a:off x="2318400" y="1310400"/>
+            <a:ext cx="972000" cy="123826"/>
+          </a:xfrm>
+          <a:prstGeom prst="rect">
+            <a:avLst/>
+          </a:prstGeom>
+          <a:noFill/>
+        </p:spPr>
+        <p:txBody>
+          <a:bodyPr wrap="square" lIns="0" rIns="0" tIns="0" bIns="0" anchor="t">
+            <a:spAutoFit/>
+          </a:bodyPr>
+          <a:lstStyle/>
+          <a:p>
+            <a:pPr algn="l">
+              <a:lnSpc>
+                <a:spcPts val="942"/>
+              </a:lnSpc>
+            </a:pPr>
+            <a:r>
+              <a:rPr sz="650" b="0">
                 <a:solidFill>
                   <a:srgbClr val="12151C"/>
                 </a:solidFill>
@@ -3383,126 +3553,6 @@
                 <a:ea typeface="맑은 고딕"/>
               </a:rPr>
               <a:t>주소를 입력해 주세요</a:t>
-            </a:r>
-          </a:p>
-        </p:txBody>
-      </p:sp>
-      <p:sp>
-        <p:nvSpPr>
-          <p:cNvPr id="10" name="텍스트"/>
-          <p:cNvSpPr txBox="1"/>
-          <p:nvPr/>
-        </p:nvSpPr>
-        <p:spPr>
-          <a:xfrm>
-            <a:off x="252000" y="1526400"/>
-            <a:ext cx="216000" cy="95251"/>
-          </a:xfrm>
-          <a:prstGeom prst="rect">
-            <a:avLst/>
-          </a:prstGeom>
-          <a:noFill/>
-        </p:spPr>
-        <p:txBody>
-          <a:bodyPr wrap="square" lIns="0" rIns="0" tIns="0" bIns="0" anchor="t">
-            <a:spAutoFit/>
-          </a:bodyPr>
-          <a:lstStyle/>
-          <a:p>
-            <a:pPr algn="l">
-              <a:lnSpc>
-                <a:spcPts val="725"/>
-              </a:lnSpc>
-            </a:pPr>
-            <a:r>
-              <a:rPr sz="500" b="1" spc="120">
-                <a:solidFill>
-                  <a:srgbClr val="6B7280"/>
-                </a:solidFill>
-                <a:latin typeface="맑은 고딕"/>
-                <a:ea typeface="맑은 고딕"/>
-              </a:rPr>
-              <a:t>TEL</a:t>
-            </a:r>
-          </a:p>
-        </p:txBody>
-      </p:sp>
-      <p:sp>
-        <p:nvSpPr>
-          <p:cNvPr id="11" name="텍스트"/>
-          <p:cNvSpPr txBox="1"/>
-          <p:nvPr/>
-        </p:nvSpPr>
-        <p:spPr>
-          <a:xfrm>
-            <a:off x="1080000" y="1526400"/>
-            <a:ext cx="216000" cy="95251"/>
-          </a:xfrm>
-          <a:prstGeom prst="rect">
-            <a:avLst/>
-          </a:prstGeom>
-          <a:noFill/>
-        </p:spPr>
-        <p:txBody>
-          <a:bodyPr wrap="square" lIns="0" rIns="0" tIns="0" bIns="0" anchor="t">
-            <a:spAutoFit/>
-          </a:bodyPr>
-          <a:lstStyle/>
-          <a:p>
-            <a:pPr algn="l">
-              <a:lnSpc>
-                <a:spcPts val="725"/>
-              </a:lnSpc>
-            </a:pPr>
-            <a:r>
-              <a:rPr sz="500" b="1" spc="120">
-                <a:solidFill>
-                  <a:srgbClr val="6B7280"/>
-                </a:solidFill>
-                <a:latin typeface="맑은 고딕"/>
-                <a:ea typeface="맑은 고딕"/>
-              </a:rPr>
-              <a:t>MAIL</a:t>
-            </a:r>
-          </a:p>
-        </p:txBody>
-      </p:sp>
-      <p:sp>
-        <p:nvSpPr>
-          <p:cNvPr id="12" name="텍스트"/>
-          <p:cNvSpPr txBox="1"/>
-          <p:nvPr/>
-        </p:nvSpPr>
-        <p:spPr>
-          <a:xfrm>
-            <a:off x="2052000" y="1526400"/>
-            <a:ext cx="216000" cy="95251"/>
-          </a:xfrm>
-          <a:prstGeom prst="rect">
-            <a:avLst/>
-          </a:prstGeom>
-          <a:noFill/>
-        </p:spPr>
-        <p:txBody>
-          <a:bodyPr wrap="square" lIns="0" rIns="0" tIns="0" bIns="0" anchor="t">
-            <a:spAutoFit/>
-          </a:bodyPr>
-          <a:lstStyle/>
-          <a:p>
-            <a:pPr algn="l">
-              <a:lnSpc>
-                <a:spcPts val="725"/>
-              </a:lnSpc>
-            </a:pPr>
-            <a:r>
-              <a:rPr sz="500" b="1" spc="120">
-                <a:solidFill>
-                  <a:srgbClr val="6B7280"/>
-                </a:solidFill>
-                <a:latin typeface="맑은 고딕"/>
-                <a:ea typeface="맑은 고딕"/>
-              </a:rPr>
-              <a:t>ADDR</a:t>
             </a:r>
           </a:p>
         </p:txBody>
@@ -3535,14 +3585,508 @@
       <p:grpSpPr/>
       <p:sp>
         <p:nvSpPr>
-          <p:cNvPr id="2" name="Rectangle 1"/>
+          <p:cNvPr id="2" name="텍스트"/>
+          <p:cNvSpPr txBox="1"/>
+          <p:nvPr/>
+        </p:nvSpPr>
+        <p:spPr>
+          <a:xfrm>
+            <a:off x="252000" y="252000"/>
+            <a:ext cx="1080000" cy="99061"/>
+          </a:xfrm>
+          <a:prstGeom prst="rect">
+            <a:avLst/>
+          </a:prstGeom>
+          <a:noFill/>
+        </p:spPr>
+        <p:txBody>
+          <a:bodyPr wrap="square" lIns="0" rIns="0" tIns="0" bIns="0" anchor="t">
+            <a:spAutoFit/>
+          </a:bodyPr>
+          <a:lstStyle/>
+          <a:p>
+            <a:pPr algn="l">
+              <a:lnSpc>
+                <a:spcPts val="754"/>
+              </a:lnSpc>
+            </a:pPr>
+            <a:r>
+              <a:rPr sz="520" b="1" spc="240">
+                <a:solidFill>
+                  <a:srgbClr val="C7DAFF"/>
+                </a:solidFill>
+                <a:latin typeface="맑은 고딕"/>
+                <a:ea typeface="맑은 고딕"/>
+              </a:rPr>
+              <a:t>담당 업무</a:t>
+            </a:r>
+          </a:p>
+        </p:txBody>
+      </p:sp>
+      <p:sp>
+        <p:nvSpPr>
+          <p:cNvPr id="3" name="Rectangle 2"/>
           <p:cNvSpPr/>
           <p:nvPr/>
         </p:nvSpPr>
         <p:spPr>
           <a:xfrm>
-            <a:off x="0" y="0"/>
-            <a:ext cx="3240000" cy="1800000"/>
+            <a:off x="252000" y="352800"/>
+            <a:ext cx="108000" cy="14400"/>
+          </a:xfrm>
+          <a:prstGeom prst="rect">
+            <a:avLst/>
+          </a:prstGeom>
+          <a:solidFill>
+            <a:srgbClr val="FFFFFF"/>
+          </a:solidFill>
+          <a:ln>
+            <a:noFill/>
+          </a:ln>
+        </p:spPr>
+        <p:txBody>
+          <a:bodyPr rtlCol="0" anchor="ctr"/>
+          <a:lstStyle/>
+          <a:p>
+            <a:pPr algn="ctr"/>
+          </a:p>
+        </p:txBody>
+      </p:sp>
+      <p:cxnSp>
+        <p:nvCxnSpPr>
+          <p:cNvPr id="4" name="Connector 3"/>
+          <p:cNvCxnSpPr/>
+          <p:nvPr/>
+        </p:nvCxnSpPr>
+        <p:spPr>
+          <a:xfrm>
+            <a:off x="252000" y="453600"/>
+            <a:ext cx="1512000" cy="0"/>
+          </a:xfrm>
+          <a:prstGeom prst="line">
+            <a:avLst/>
+          </a:prstGeom>
+          <a:ln w="3600">
+            <a:solidFill>
+              <a:srgbClr val="669AFF"/>
+            </a:solidFill>
+          </a:ln>
+        </p:spPr>
+      </p:cxnSp>
+      <p:sp>
+        <p:nvSpPr>
+          <p:cNvPr id="5" name="텍스트"/>
+          <p:cNvSpPr txBox="1"/>
+          <p:nvPr/>
+        </p:nvSpPr>
+        <p:spPr>
+          <a:xfrm>
+            <a:off x="252000" y="507600"/>
+            <a:ext cx="216000" cy="95251"/>
+          </a:xfrm>
+          <a:prstGeom prst="rect">
+            <a:avLst/>
+          </a:prstGeom>
+          <a:noFill/>
+        </p:spPr>
+        <p:txBody>
+          <a:bodyPr wrap="square" lIns="0" rIns="0" tIns="0" bIns="0" anchor="t">
+            <a:spAutoFit/>
+          </a:bodyPr>
+          <a:lstStyle/>
+          <a:p>
+            <a:pPr algn="l">
+              <a:lnSpc>
+                <a:spcPts val="725"/>
+              </a:lnSpc>
+            </a:pPr>
+            <a:r>
+              <a:rPr sz="500" b="1" spc="100">
+                <a:solidFill>
+                  <a:srgbClr val="C7DAFF"/>
+                </a:solidFill>
+                <a:latin typeface="맑은 고딕"/>
+                <a:ea typeface="맑은 고딕"/>
+              </a:rPr>
+              <a:t>01</a:t>
+            </a:r>
+          </a:p>
+        </p:txBody>
+      </p:sp>
+      <p:sp>
+        <p:nvSpPr>
+          <p:cNvPr id="6" name="텍스트"/>
+          <p:cNvSpPr txBox="1"/>
+          <p:nvPr/>
+        </p:nvSpPr>
+        <p:spPr>
+          <a:xfrm>
+            <a:off x="489600" y="496800"/>
+            <a:ext cx="1260000" cy="133351"/>
+          </a:xfrm>
+          <a:prstGeom prst="rect">
+            <a:avLst/>
+          </a:prstGeom>
+          <a:noFill/>
+        </p:spPr>
+        <p:txBody>
+          <a:bodyPr wrap="square" lIns="0" rIns="0" tIns="0" bIns="0" anchor="t">
+            <a:spAutoFit/>
+          </a:bodyPr>
+          <a:lstStyle/>
+          <a:p>
+            <a:pPr algn="l">
+              <a:lnSpc>
+                <a:spcPts val="1015"/>
+              </a:lnSpc>
+            </a:pPr>
+            <a:r>
+              <a:rPr sz="700" b="0">
+                <a:solidFill>
+                  <a:srgbClr val="FFFFFF"/>
+                </a:solidFill>
+                <a:latin typeface="맑은 고딕"/>
+                <a:ea typeface="맑은 고딕"/>
+              </a:rPr>
+              <a:t>마케팅</a:t>
+            </a:r>
+          </a:p>
+        </p:txBody>
+      </p:sp>
+      <p:cxnSp>
+        <p:nvCxnSpPr>
+          <p:cNvPr id="7" name="Connector 6"/>
+          <p:cNvCxnSpPr/>
+          <p:nvPr/>
+        </p:nvCxnSpPr>
+        <p:spPr>
+          <a:xfrm>
+            <a:off x="252000" y="640800"/>
+            <a:ext cx="1512000" cy="0"/>
+          </a:xfrm>
+          <a:prstGeom prst="line">
+            <a:avLst/>
+          </a:prstGeom>
+          <a:ln w="3600">
+            <a:solidFill>
+              <a:srgbClr val="669AFF"/>
+            </a:solidFill>
+          </a:ln>
+        </p:spPr>
+      </p:cxnSp>
+      <p:sp>
+        <p:nvSpPr>
+          <p:cNvPr id="8" name="텍스트"/>
+          <p:cNvSpPr txBox="1"/>
+          <p:nvPr/>
+        </p:nvSpPr>
+        <p:spPr>
+          <a:xfrm>
+            <a:off x="252000" y="694800"/>
+            <a:ext cx="216000" cy="95251"/>
+          </a:xfrm>
+          <a:prstGeom prst="rect">
+            <a:avLst/>
+          </a:prstGeom>
+          <a:noFill/>
+        </p:spPr>
+        <p:txBody>
+          <a:bodyPr wrap="square" lIns="0" rIns="0" tIns="0" bIns="0" anchor="t">
+            <a:spAutoFit/>
+          </a:bodyPr>
+          <a:lstStyle/>
+          <a:p>
+            <a:pPr algn="l">
+              <a:lnSpc>
+                <a:spcPts val="725"/>
+              </a:lnSpc>
+            </a:pPr>
+            <a:r>
+              <a:rPr sz="500" b="1" spc="100">
+                <a:solidFill>
+                  <a:srgbClr val="C7DAFF"/>
+                </a:solidFill>
+                <a:latin typeface="맑은 고딕"/>
+                <a:ea typeface="맑은 고딕"/>
+              </a:rPr>
+              <a:t>02</a:t>
+            </a:r>
+          </a:p>
+        </p:txBody>
+      </p:sp>
+      <p:sp>
+        <p:nvSpPr>
+          <p:cNvPr id="9" name="텍스트"/>
+          <p:cNvSpPr txBox="1"/>
+          <p:nvPr/>
+        </p:nvSpPr>
+        <p:spPr>
+          <a:xfrm>
+            <a:off x="489600" y="684000"/>
+            <a:ext cx="1260000" cy="133351"/>
+          </a:xfrm>
+          <a:prstGeom prst="rect">
+            <a:avLst/>
+          </a:prstGeom>
+          <a:noFill/>
+        </p:spPr>
+        <p:txBody>
+          <a:bodyPr wrap="square" lIns="0" rIns="0" tIns="0" bIns="0" anchor="t">
+            <a:spAutoFit/>
+          </a:bodyPr>
+          <a:lstStyle/>
+          <a:p>
+            <a:pPr algn="l">
+              <a:lnSpc>
+                <a:spcPts val="1015"/>
+              </a:lnSpc>
+            </a:pPr>
+            <a:r>
+              <a:rPr sz="700" b="0">
+                <a:solidFill>
+                  <a:srgbClr val="FFFFFF"/>
+                </a:solidFill>
+                <a:latin typeface="맑은 고딕"/>
+                <a:ea typeface="맑은 고딕"/>
+              </a:rPr>
+              <a:t>개발</a:t>
+            </a:r>
+          </a:p>
+        </p:txBody>
+      </p:sp>
+      <p:cxnSp>
+        <p:nvCxnSpPr>
+          <p:cNvPr id="10" name="Connector 9"/>
+          <p:cNvCxnSpPr/>
+          <p:nvPr/>
+        </p:nvCxnSpPr>
+        <p:spPr>
+          <a:xfrm>
+            <a:off x="252000" y="828000"/>
+            <a:ext cx="1512000" cy="0"/>
+          </a:xfrm>
+          <a:prstGeom prst="line">
+            <a:avLst/>
+          </a:prstGeom>
+          <a:ln w="3600">
+            <a:solidFill>
+              <a:srgbClr val="669AFF"/>
+            </a:solidFill>
+          </a:ln>
+        </p:spPr>
+      </p:cxnSp>
+      <p:sp>
+        <p:nvSpPr>
+          <p:cNvPr id="11" name="텍스트"/>
+          <p:cNvSpPr txBox="1"/>
+          <p:nvPr/>
+        </p:nvSpPr>
+        <p:spPr>
+          <a:xfrm>
+            <a:off x="252000" y="882000"/>
+            <a:ext cx="216000" cy="95251"/>
+          </a:xfrm>
+          <a:prstGeom prst="rect">
+            <a:avLst/>
+          </a:prstGeom>
+          <a:noFill/>
+        </p:spPr>
+        <p:txBody>
+          <a:bodyPr wrap="square" lIns="0" rIns="0" tIns="0" bIns="0" anchor="t">
+            <a:spAutoFit/>
+          </a:bodyPr>
+          <a:lstStyle/>
+          <a:p>
+            <a:pPr algn="l">
+              <a:lnSpc>
+                <a:spcPts val="725"/>
+              </a:lnSpc>
+            </a:pPr>
+            <a:r>
+              <a:rPr sz="500" b="1" spc="100">
+                <a:solidFill>
+                  <a:srgbClr val="C7DAFF"/>
+                </a:solidFill>
+                <a:latin typeface="맑은 고딕"/>
+                <a:ea typeface="맑은 고딕"/>
+              </a:rPr>
+              <a:t>03</a:t>
+            </a:r>
+          </a:p>
+        </p:txBody>
+      </p:sp>
+      <p:sp>
+        <p:nvSpPr>
+          <p:cNvPr id="12" name="텍스트"/>
+          <p:cNvSpPr txBox="1"/>
+          <p:nvPr/>
+        </p:nvSpPr>
+        <p:spPr>
+          <a:xfrm>
+            <a:off x="489600" y="871200"/>
+            <a:ext cx="1260000" cy="133351"/>
+          </a:xfrm>
+          <a:prstGeom prst="rect">
+            <a:avLst/>
+          </a:prstGeom>
+          <a:noFill/>
+        </p:spPr>
+        <p:txBody>
+          <a:bodyPr wrap="square" lIns="0" rIns="0" tIns="0" bIns="0" anchor="t">
+            <a:spAutoFit/>
+          </a:bodyPr>
+          <a:lstStyle/>
+          <a:p>
+            <a:pPr algn="l">
+              <a:lnSpc>
+                <a:spcPts val="1015"/>
+              </a:lnSpc>
+            </a:pPr>
+            <a:r>
+              <a:rPr sz="700" b="0">
+                <a:solidFill>
+                  <a:srgbClr val="FFFFFF"/>
+                </a:solidFill>
+                <a:latin typeface="맑은 고딕"/>
+                <a:ea typeface="맑은 고딕"/>
+              </a:rPr>
+              <a:t>재무 · 회계</a:t>
+            </a:r>
+          </a:p>
+        </p:txBody>
+      </p:sp>
+      <p:cxnSp>
+        <p:nvCxnSpPr>
+          <p:cNvPr id="13" name="Connector 12"/>
+          <p:cNvCxnSpPr/>
+          <p:nvPr/>
+        </p:nvCxnSpPr>
+        <p:spPr>
+          <a:xfrm>
+            <a:off x="252000" y="1015200"/>
+            <a:ext cx="1512000" cy="0"/>
+          </a:xfrm>
+          <a:prstGeom prst="line">
+            <a:avLst/>
+          </a:prstGeom>
+          <a:ln w="3600">
+            <a:solidFill>
+              <a:srgbClr val="669AFF"/>
+            </a:solidFill>
+          </a:ln>
+        </p:spPr>
+      </p:cxnSp>
+      <p:sp>
+        <p:nvSpPr>
+          <p:cNvPr id="14" name="텍스트"/>
+          <p:cNvSpPr txBox="1"/>
+          <p:nvPr/>
+        </p:nvSpPr>
+        <p:spPr>
+          <a:xfrm>
+            <a:off x="252000" y="1069200"/>
+            <a:ext cx="216000" cy="95251"/>
+          </a:xfrm>
+          <a:prstGeom prst="rect">
+            <a:avLst/>
+          </a:prstGeom>
+          <a:noFill/>
+        </p:spPr>
+        <p:txBody>
+          <a:bodyPr wrap="square" lIns="0" rIns="0" tIns="0" bIns="0" anchor="t">
+            <a:spAutoFit/>
+          </a:bodyPr>
+          <a:lstStyle/>
+          <a:p>
+            <a:pPr algn="l">
+              <a:lnSpc>
+                <a:spcPts val="725"/>
+              </a:lnSpc>
+            </a:pPr>
+            <a:r>
+              <a:rPr sz="500" b="1" spc="100">
+                <a:solidFill>
+                  <a:srgbClr val="C7DAFF"/>
+                </a:solidFill>
+                <a:latin typeface="맑은 고딕"/>
+                <a:ea typeface="맑은 고딕"/>
+              </a:rPr>
+              <a:t>04</a:t>
+            </a:r>
+          </a:p>
+        </p:txBody>
+      </p:sp>
+      <p:sp>
+        <p:nvSpPr>
+          <p:cNvPr id="15" name="텍스트"/>
+          <p:cNvSpPr txBox="1"/>
+          <p:nvPr/>
+        </p:nvSpPr>
+        <p:spPr>
+          <a:xfrm>
+            <a:off x="489600" y="1058400"/>
+            <a:ext cx="1260000" cy="133351"/>
+          </a:xfrm>
+          <a:prstGeom prst="rect">
+            <a:avLst/>
+          </a:prstGeom>
+          <a:noFill/>
+        </p:spPr>
+        <p:txBody>
+          <a:bodyPr wrap="square" lIns="0" rIns="0" tIns="0" bIns="0" anchor="t">
+            <a:spAutoFit/>
+          </a:bodyPr>
+          <a:lstStyle/>
+          <a:p>
+            <a:pPr algn="l">
+              <a:lnSpc>
+                <a:spcPts val="1015"/>
+              </a:lnSpc>
+            </a:pPr>
+            <a:r>
+              <a:rPr sz="700" b="0">
+                <a:solidFill>
+                  <a:srgbClr val="FFFFFF"/>
+                </a:solidFill>
+                <a:latin typeface="맑은 고딕"/>
+                <a:ea typeface="맑은 고딕"/>
+              </a:rPr>
+              <a:t>고객 응대</a:t>
+            </a:r>
+          </a:p>
+        </p:txBody>
+      </p:sp>
+      <p:cxnSp>
+        <p:nvCxnSpPr>
+          <p:cNvPr id="16" name="Connector 15"/>
+          <p:cNvCxnSpPr/>
+          <p:nvPr/>
+        </p:nvCxnSpPr>
+        <p:spPr>
+          <a:xfrm>
+            <a:off x="252000" y="1202400"/>
+            <a:ext cx="1512000" cy="0"/>
+          </a:xfrm>
+          <a:prstGeom prst="line">
+            <a:avLst/>
+          </a:prstGeom>
+          <a:ln w="3600">
+            <a:solidFill>
+              <a:srgbClr val="669AFF"/>
+            </a:solidFill>
+          </a:ln>
+        </p:spPr>
+      </p:cxnSp>
+      <p:sp>
+        <p:nvSpPr>
+          <p:cNvPr id="17" name="Rectangle 16"/>
+          <p:cNvSpPr/>
+          <p:nvPr/>
+        </p:nvSpPr>
+        <p:spPr>
+          <a:xfrm>
+            <a:off x="2088000" y="252000"/>
+            <a:ext cx="900000" cy="1296000"/>
           </a:xfrm>
           <a:prstGeom prst="rect">
             <a:avLst/>
@@ -3564,130 +4108,14 @@
       </p:sp>
       <p:sp>
         <p:nvSpPr>
-          <p:cNvPr id="3" name="Freeform 2"/>
-          <p:cNvSpPr/>
-          <p:nvPr/>
-        </p:nvSpPr>
-        <p:spPr>
-          <a:xfrm>
-            <a:off x="2412000" y="972000"/>
-            <a:ext cx="828000" cy="828000"/>
-          </a:xfrm>
-          <a:custGeom>
-            <a:avLst/>
-            <a:gdLst/>
-            <a:ahLst/>
-            <a:cxnLst/>
-            <a:rect l="l" t="t" r="r" b="b"/>
-            <a:pathLst>
-              <a:path w="828000" h="828000">
-                <a:moveTo>
-                  <a:pt x="828000" y="828000"/>
-                </a:moveTo>
-                <a:lnTo>
-                  <a:pt x="0" y="828000"/>
-                </a:lnTo>
-                <a:lnTo>
-                  <a:pt x="1773" y="773846"/>
-                </a:lnTo>
-                <a:lnTo>
-                  <a:pt x="7084" y="719924"/>
-                </a:lnTo>
-                <a:lnTo>
-                  <a:pt x="15910" y="666465"/>
-                </a:lnTo>
-                <a:lnTo>
-                  <a:pt x="28213" y="613698"/>
-                </a:lnTo>
-                <a:lnTo>
-                  <a:pt x="43942" y="561848"/>
-                </a:lnTo>
-                <a:lnTo>
-                  <a:pt x="63028" y="511138"/>
-                </a:lnTo>
-                <a:lnTo>
-                  <a:pt x="85389" y="461785"/>
-                </a:lnTo>
-                <a:lnTo>
-                  <a:pt x="110931" y="414000"/>
-                </a:lnTo>
-                <a:lnTo>
-                  <a:pt x="139543" y="367988"/>
-                </a:lnTo>
-                <a:lnTo>
-                  <a:pt x="171103" y="323946"/>
-                </a:lnTo>
-                <a:lnTo>
-                  <a:pt x="205477" y="282062"/>
-                </a:lnTo>
-                <a:lnTo>
-                  <a:pt x="242516" y="242516"/>
-                </a:lnTo>
-                <a:lnTo>
-                  <a:pt x="282062" y="205477"/>
-                </a:lnTo>
-                <a:lnTo>
-                  <a:pt x="323946" y="171103"/>
-                </a:lnTo>
-                <a:lnTo>
-                  <a:pt x="367988" y="139543"/>
-                </a:lnTo>
-                <a:lnTo>
-                  <a:pt x="414000" y="110931"/>
-                </a:lnTo>
-                <a:lnTo>
-                  <a:pt x="461785" y="85389"/>
-                </a:lnTo>
-                <a:lnTo>
-                  <a:pt x="511138" y="63028"/>
-                </a:lnTo>
-                <a:lnTo>
-                  <a:pt x="561848" y="43942"/>
-                </a:lnTo>
-                <a:lnTo>
-                  <a:pt x="613698" y="28213"/>
-                </a:lnTo>
-                <a:lnTo>
-                  <a:pt x="666465" y="15910"/>
-                </a:lnTo>
-                <a:lnTo>
-                  <a:pt x="719924" y="7084"/>
-                </a:lnTo>
-                <a:lnTo>
-                  <a:pt x="773846" y="1773"/>
-                </a:lnTo>
-                <a:lnTo>
-                  <a:pt x="828000" y="0"/>
-                </a:lnTo>
-                <a:close/>
-              </a:path>
-            </a:pathLst>
-          </a:custGeom>
-          <a:solidFill>
-            <a:srgbClr val="6096FF"/>
-          </a:solidFill>
-          <a:ln>
-            <a:noFill/>
-          </a:ln>
-        </p:spPr>
-        <p:txBody>
-          <a:bodyPr rtlCol="0" anchor="ctr"/>
-          <a:lstStyle/>
-          <a:p>
-            <a:pPr algn="ctr"/>
-          </a:p>
-        </p:txBody>
-      </p:sp>
-      <p:sp>
-        <p:nvSpPr>
-          <p:cNvPr id="4" name="텍스트"/>
+          <p:cNvPr id="18" name="텍스트"/>
           <p:cNvSpPr txBox="1"/>
           <p:nvPr/>
         </p:nvSpPr>
         <p:spPr>
           <a:xfrm>
-            <a:off x="252000" y="432000"/>
-            <a:ext cx="2304000" cy="720000"/>
+            <a:off x="2196000" y="360000"/>
+            <a:ext cx="684000" cy="95251"/>
           </a:xfrm>
           <a:prstGeom prst="rect">
             <a:avLst/>
@@ -3702,49 +4130,177 @@
           <a:p>
             <a:pPr algn="l">
               <a:lnSpc>
-                <a:spcPts val="1884"/>
+                <a:spcPts val="725"/>
               </a:lnSpc>
             </a:pPr>
             <a:r>
-              <a:rPr sz="1300" b="1">
+              <a:rPr sz="500" b="1" spc="240">
+                <a:solidFill>
+                  <a:srgbClr val="FFFFFF">
+                    <a:alpha val="75000"/>
+                  </a:srgbClr>
+                </a:solidFill>
+                <a:latin typeface="맑은 고딕"/>
+                <a:ea typeface="맑은 고딕"/>
+              </a:rPr>
+              <a:t>INFO</a:t>
+            </a:r>
+          </a:p>
+        </p:txBody>
+      </p:sp>
+      <p:sp>
+        <p:nvSpPr>
+          <p:cNvPr id="19" name="텍스트"/>
+          <p:cNvSpPr txBox="1"/>
+          <p:nvPr/>
+        </p:nvSpPr>
+        <p:spPr>
+          <a:xfrm>
+            <a:off x="2196000" y="504000"/>
+            <a:ext cx="684000" cy="121921"/>
+          </a:xfrm>
+          <a:prstGeom prst="rect">
+            <a:avLst/>
+          </a:prstGeom>
+          <a:noFill/>
+        </p:spPr>
+        <p:txBody>
+          <a:bodyPr wrap="square" lIns="0" rIns="0" tIns="0" bIns="0" anchor="t">
+            <a:spAutoFit/>
+          </a:bodyPr>
+          <a:lstStyle/>
+          <a:p>
+            <a:pPr algn="l">
+              <a:lnSpc>
+                <a:spcPts val="927"/>
+              </a:lnSpc>
+            </a:pPr>
+            <a:r>
+              <a:rPr sz="640" b="1">
                 <a:solidFill>
                   <a:srgbClr val="FFFFFF"/>
                 </a:solidFill>
                 <a:latin typeface="맑은 고딕"/>
                 <a:ea typeface="맑은 고딕"/>
               </a:rPr>
-              <a:t>오늘의 성실이 내일의</a:t>
-            </a:r>
-          </a:p>
+              <a:t>평일 09:00 – 18:00</a:t>
+            </a:r>
+          </a:p>
+        </p:txBody>
+      </p:sp>
+      <p:cxnSp>
+        <p:nvCxnSpPr>
+          <p:cNvPr id="20" name="Connector 19"/>
+          <p:cNvCxnSpPr/>
+          <p:nvPr/>
+        </p:nvCxnSpPr>
+        <p:spPr>
+          <a:xfrm>
+            <a:off x="2196000" y="770400"/>
+            <a:ext cx="684000" cy="0"/>
+          </a:xfrm>
+          <a:prstGeom prst="line">
+            <a:avLst/>
+          </a:prstGeom>
+          <a:ln w="3600">
+            <a:solidFill>
+              <a:srgbClr val="FFFFFF"/>
+            </a:solidFill>
+          </a:ln>
+        </p:spPr>
+      </p:cxnSp>
+      <p:sp>
+        <p:nvSpPr>
+          <p:cNvPr id="21" name="텍스트"/>
+          <p:cNvSpPr txBox="1"/>
+          <p:nvPr/>
+        </p:nvSpPr>
+        <p:spPr>
+          <a:xfrm>
+            <a:off x="2196000" y="849600"/>
+            <a:ext cx="684000" cy="91441"/>
+          </a:xfrm>
+          <a:prstGeom prst="rect">
+            <a:avLst/>
+          </a:prstGeom>
+          <a:noFill/>
+        </p:spPr>
+        <p:txBody>
+          <a:bodyPr wrap="square" lIns="0" rIns="0" tIns="0" bIns="0" anchor="t">
+            <a:spAutoFit/>
+          </a:bodyPr>
+          <a:lstStyle/>
           <a:p>
             <a:pPr algn="l">
               <a:lnSpc>
-                <a:spcPts val="1884"/>
+                <a:spcPts val="696"/>
               </a:lnSpc>
             </a:pPr>
             <a:r>
-              <a:rPr sz="1300" b="1">
+              <a:rPr sz="480" b="1" spc="140">
+                <a:solidFill>
+                  <a:srgbClr val="FFFFFF">
+                    <a:alpha val="75000"/>
+                  </a:srgbClr>
+                </a:solidFill>
+                <a:latin typeface="맑은 고딕"/>
+                <a:ea typeface="맑은 고딕"/>
+              </a:rPr>
+              <a:t>INSTAGRAM</a:t>
+            </a:r>
+          </a:p>
+        </p:txBody>
+      </p:sp>
+      <p:sp>
+        <p:nvSpPr>
+          <p:cNvPr id="22" name="텍스트"/>
+          <p:cNvSpPr txBox="1"/>
+          <p:nvPr/>
+        </p:nvSpPr>
+        <p:spPr>
+          <a:xfrm>
+            <a:off x="2196000" y="957600"/>
+            <a:ext cx="684000" cy="121921"/>
+          </a:xfrm>
+          <a:prstGeom prst="rect">
+            <a:avLst/>
+          </a:prstGeom>
+          <a:noFill/>
+        </p:spPr>
+        <p:txBody>
+          <a:bodyPr wrap="square" lIns="0" rIns="0" tIns="0" bIns="0" anchor="t">
+            <a:spAutoFit/>
+          </a:bodyPr>
+          <a:lstStyle/>
+          <a:p>
+            <a:pPr algn="l">
+              <a:lnSpc>
+                <a:spcPts val="927"/>
+              </a:lnSpc>
+            </a:pPr>
+            <a:r>
+              <a:rPr sz="640" b="1">
                 <a:solidFill>
                   <a:srgbClr val="FFFFFF"/>
                 </a:solidFill>
                 <a:latin typeface="맑은 고딕"/>
                 <a:ea typeface="맑은 고딕"/>
               </a:rPr>
-              <a:t>신뢰가 됩니다</a:t>
-            </a:r>
-          </a:p>
-        </p:txBody>
-      </p:sp>
-      <p:sp>
-        <p:nvSpPr>
-          <p:cNvPr id="5" name="텍스트"/>
+              <a:t>@아이디</a:t>
+            </a:r>
+          </a:p>
+        </p:txBody>
+      </p:sp>
+      <p:sp>
+        <p:nvSpPr>
+          <p:cNvPr id="23" name="텍스트"/>
           <p:cNvSpPr txBox="1"/>
           <p:nvPr/>
         </p:nvSpPr>
         <p:spPr>
           <a:xfrm>
-            <a:off x="252000" y="1476000"/>
-            <a:ext cx="1800000" cy="133351"/>
+            <a:off x="2196000" y="1368000"/>
+            <a:ext cx="720000" cy="106681"/>
           </a:xfrm>
           <a:prstGeom prst="rect">
             <a:avLst/>
@@ -3759,11 +4315,11 @@
           <a:p>
             <a:pPr algn="l">
               <a:lnSpc>
-                <a:spcPts val="1015"/>
+                <a:spcPts val="811"/>
               </a:lnSpc>
             </a:pPr>
             <a:r>
-              <a:rPr sz="700" b="1" spc="200">
+              <a:rPr sz="560" b="1" spc="80">
                 <a:solidFill>
                   <a:srgbClr val="FFFFFF"/>
                 </a:solidFill>
